--- a/Activities/Presentations/Lab 5.pptx
+++ b/Activities/Presentations/Lab 5.pptx
@@ -352,7 +352,7 @@
           <a:p>
             <a:fld id="{5168A8D3-8D1B-4876-AABD-6CCD1B1613E5}" type="datetimeFigureOut">
               <a:rPr lang="en-US" smtClean="0"/>
-              <a:t>6/1/2020</a:t>
+              <a:t>8/1/2020</a:t>
             </a:fld>
             <a:endParaRPr lang="en-US"/>
           </a:p>
@@ -520,7 +520,7 @@
           <a:p>
             <a:fld id="{5168A8D3-8D1B-4876-AABD-6CCD1B1613E5}" type="datetimeFigureOut">
               <a:rPr lang="en-US" smtClean="0"/>
-              <a:t>6/1/2020</a:t>
+              <a:t>8/1/2020</a:t>
             </a:fld>
             <a:endParaRPr lang="en-US"/>
           </a:p>
@@ -698,7 +698,7 @@
           <a:p>
             <a:fld id="{5168A8D3-8D1B-4876-AABD-6CCD1B1613E5}" type="datetimeFigureOut">
               <a:rPr lang="en-US" smtClean="0"/>
-              <a:t>6/1/2020</a:t>
+              <a:t>8/1/2020</a:t>
             </a:fld>
             <a:endParaRPr lang="en-US"/>
           </a:p>
@@ -866,7 +866,7 @@
           <a:p>
             <a:fld id="{5168A8D3-8D1B-4876-AABD-6CCD1B1613E5}" type="datetimeFigureOut">
               <a:rPr lang="en-US" smtClean="0"/>
-              <a:t>6/1/2020</a:t>
+              <a:t>8/1/2020</a:t>
             </a:fld>
             <a:endParaRPr lang="en-US"/>
           </a:p>
@@ -1111,7 +1111,7 @@
           <a:p>
             <a:fld id="{5168A8D3-8D1B-4876-AABD-6CCD1B1613E5}" type="datetimeFigureOut">
               <a:rPr lang="en-US" smtClean="0"/>
-              <a:t>6/1/2020</a:t>
+              <a:t>8/1/2020</a:t>
             </a:fld>
             <a:endParaRPr lang="en-US"/>
           </a:p>
@@ -1396,7 +1396,7 @@
           <a:p>
             <a:fld id="{5168A8D3-8D1B-4876-AABD-6CCD1B1613E5}" type="datetimeFigureOut">
               <a:rPr lang="en-US" smtClean="0"/>
-              <a:t>6/1/2020</a:t>
+              <a:t>8/1/2020</a:t>
             </a:fld>
             <a:endParaRPr lang="en-US"/>
           </a:p>
@@ -1815,7 +1815,7 @@
           <a:p>
             <a:fld id="{5168A8D3-8D1B-4876-AABD-6CCD1B1613E5}" type="datetimeFigureOut">
               <a:rPr lang="en-US" smtClean="0"/>
-              <a:t>6/1/2020</a:t>
+              <a:t>8/1/2020</a:t>
             </a:fld>
             <a:endParaRPr lang="en-US"/>
           </a:p>
@@ -1932,7 +1932,7 @@
           <a:p>
             <a:fld id="{5168A8D3-8D1B-4876-AABD-6CCD1B1613E5}" type="datetimeFigureOut">
               <a:rPr lang="en-US" smtClean="0"/>
-              <a:t>6/1/2020</a:t>
+              <a:t>8/1/2020</a:t>
             </a:fld>
             <a:endParaRPr lang="en-US"/>
           </a:p>
@@ -2027,7 +2027,7 @@
           <a:p>
             <a:fld id="{5168A8D3-8D1B-4876-AABD-6CCD1B1613E5}" type="datetimeFigureOut">
               <a:rPr lang="en-US" smtClean="0"/>
-              <a:t>6/1/2020</a:t>
+              <a:t>8/1/2020</a:t>
             </a:fld>
             <a:endParaRPr lang="en-US"/>
           </a:p>
@@ -2302,7 +2302,7 @@
           <a:p>
             <a:fld id="{5168A8D3-8D1B-4876-AABD-6CCD1B1613E5}" type="datetimeFigureOut">
               <a:rPr lang="en-US" smtClean="0"/>
-              <a:t>6/1/2020</a:t>
+              <a:t>8/1/2020</a:t>
             </a:fld>
             <a:endParaRPr lang="en-US"/>
           </a:p>
@@ -2554,7 +2554,7 @@
           <a:p>
             <a:fld id="{5168A8D3-8D1B-4876-AABD-6CCD1B1613E5}" type="datetimeFigureOut">
               <a:rPr lang="en-US" smtClean="0"/>
-              <a:t>6/1/2020</a:t>
+              <a:t>8/1/2020</a:t>
             </a:fld>
             <a:endParaRPr lang="en-US"/>
           </a:p>
@@ -2765,7 +2765,7 @@
           <a:p>
             <a:fld id="{5168A8D3-8D1B-4876-AABD-6CCD1B1613E5}" type="datetimeFigureOut">
               <a:rPr lang="en-US" smtClean="0"/>
-              <a:t>6/1/2020</a:t>
+              <a:t>8/1/2020</a:t>
             </a:fld>
             <a:endParaRPr lang="en-US"/>
           </a:p>
@@ -3157,7 +3157,15 @@
           <a:p>
             <a:r>
               <a:rPr lang="en-US" dirty="0"/>
-              <a:t>Lab 5</a:t>
+              <a:t>Model Reference </a:t>
+            </a:r>
+            <a:r>
+              <a:rPr lang="en-US" dirty="0" err="1"/>
+              <a:t>Adaptif</a:t>
+            </a:r>
+            <a:r>
+              <a:rPr lang="en-US" dirty="0"/>
+              <a:t> Control (MRAC)</a:t>
             </a:r>
           </a:p>
         </p:txBody>
@@ -3179,10 +3187,7 @@
           </a:bodyPr>
           <a:lstStyle/>
           <a:p>
-            <a:r>
-              <a:rPr lang="en-US" dirty="0"/>
-              <a:t>Model Based Controller</a:t>
-            </a:r>
+            <a:endParaRPr lang="en-US" dirty="0"/>
           </a:p>
         </p:txBody>
       </p:sp>
@@ -3236,10 +3241,6 @@
           <a:bodyPr/>
           <a:lstStyle/>
           <a:p>
-            <a:r>
-              <a:rPr lang="en-US"/>
-              <a:t>Model Reference Adaptive Control</a:t>
-            </a:r>
             <a:endParaRPr lang="en-US" dirty="0"/>
           </a:p>
         </p:txBody>
@@ -3268,8 +3269,8 @@
         </p:blipFill>
         <p:spPr>
           <a:xfrm>
-            <a:off x="1115616" y="1988840"/>
-            <a:ext cx="7513050" cy="3816424"/>
+            <a:off x="683568" y="2132856"/>
+            <a:ext cx="8229600" cy="4180412"/>
           </a:xfrm>
           <a:prstGeom prst="rect">
             <a:avLst/>
@@ -3325,17 +3326,10 @@
         <p:spPr/>
         <p:txBody>
           <a:bodyPr>
-            <a:normAutofit fontScale="90000"/>
+            <a:normAutofit/>
           </a:bodyPr>
           <a:lstStyle/>
           <a:p>
-            <a:r>
-              <a:rPr lang="id-ID" dirty="0"/>
-              <a:t>MRAC</a:t>
-            </a:r>
-            <a:br>
-              <a:rPr lang="id-ID" dirty="0"/>
-            </a:br>
             <a:r>
               <a:rPr lang="id-ID" dirty="0"/>
               <a:t>MIT Rule</a:t>
@@ -3598,17 +3592,10 @@
         <p:spPr/>
         <p:txBody>
           <a:bodyPr>
-            <a:normAutofit fontScale="90000"/>
+            <a:normAutofit/>
           </a:bodyPr>
           <a:lstStyle/>
           <a:p>
-            <a:r>
-              <a:rPr lang="id-ID" dirty="0"/>
-              <a:t>MRAC</a:t>
-            </a:r>
-            <a:br>
-              <a:rPr lang="id-ID" dirty="0"/>
-            </a:br>
             <a:r>
               <a:rPr lang="id-ID" dirty="0"/>
               <a:t>Modified MIT Rule</a:t>
@@ -3947,17 +3934,10 @@
         <p:spPr/>
         <p:txBody>
           <a:bodyPr>
-            <a:normAutofit fontScale="90000"/>
+            <a:normAutofit/>
           </a:bodyPr>
           <a:lstStyle/>
           <a:p>
-            <a:r>
-              <a:rPr lang="en-US" dirty="0"/>
-              <a:t>Model Reference Adaptive Control</a:t>
-            </a:r>
-            <a:br>
-              <a:rPr lang="en-US" dirty="0"/>
-            </a:br>
             <a:r>
               <a:rPr lang="en-US" dirty="0"/>
               <a:t>Modified MIT Rule</a:t>
@@ -4076,7 +4056,10 @@
           <a:bodyPr/>
           <a:lstStyle/>
           <a:p>
-            <a:endParaRPr lang="en-US"/>
+            <a:r>
+              <a:rPr lang="en-US" dirty="0"/>
+              <a:t>Results</a:t>
+            </a:r>
           </a:p>
         </p:txBody>
       </p:sp>
